--- a/outputs/AniManga_O-KG_presentazione_dettagliata.pptx
+++ b/outputs/AniManga_O-KG_presentazione_dettagliata.pptx
@@ -5,7 +5,7 @@
     <p:sldMasterId id="2147483648" r:id="rId1"/>
   </p:sldMasterIdLst>
   <p:notesMasterIdLst>
-    <p:notesMasterId r:id="rId20"/>
+    <p:notesMasterId r:id="rId21"/>
   </p:notesMasterIdLst>
   <p:sldIdLst>
     <p:sldId id="256" r:id="rId2"/>
@@ -23,9 +23,10 @@
     <p:sldId id="268" r:id="rId14"/>
     <p:sldId id="269" r:id="rId15"/>
     <p:sldId id="270" r:id="rId16"/>
-    <p:sldId id="271" r:id="rId17"/>
-    <p:sldId id="272" r:id="rId18"/>
-    <p:sldId id="275" r:id="rId19"/>
+    <p:sldId id="276" r:id="rId17"/>
+    <p:sldId id="271" r:id="rId18"/>
+    <p:sldId id="272" r:id="rId19"/>
+    <p:sldId id="275" r:id="rId20"/>
   </p:sldIdLst>
   <p:sldSz cx="12192000" cy="6858000"/>
   <p:notesSz cx="6858000" cy="9144000"/>
@@ -132,6 +133,35 @@
 </p:presentation>
 </file>
 
+<file path=ppt/changesInfos/changesInfo1.xml><?xml version="1.0" encoding="utf-8"?>
+<pc:chgInfo xmlns:a="http://schemas.openxmlformats.org/drawingml/2006/main" xmlns:r="http://schemas.openxmlformats.org/officeDocument/2006/relationships" xmlns:ac="http://schemas.microsoft.com/office/drawing/2013/main/command" xmlns:pc="http://schemas.microsoft.com/office/powerpoint/2013/main/command">
+  <pc:docChgLst>
+    <pc:chgData name="Albieri Sara" userId="647da041-e122-4c39-b456-4b0bb026a939" providerId="ADAL" clId="{13D4D05E-BEA8-4E61-99A5-0FED29BC8753}"/>
+    <pc:docChg chg="modSld">
+      <pc:chgData name="Albieri Sara" userId="647da041-e122-4c39-b456-4b0bb026a939" providerId="ADAL" clId="{13D4D05E-BEA8-4E61-99A5-0FED29BC8753}" dt="2026-07-01T09:04:30.488" v="6" actId="1037"/>
+      <pc:docMkLst>
+        <pc:docMk/>
+      </pc:docMkLst>
+      <pc:sldChg chg="modSp mod">
+        <pc:chgData name="Albieri Sara" userId="647da041-e122-4c39-b456-4b0bb026a939" providerId="ADAL" clId="{13D4D05E-BEA8-4E61-99A5-0FED29BC8753}" dt="2026-07-01T09:04:30.488" v="6" actId="1037"/>
+        <pc:sldMkLst>
+          <pc:docMk/>
+          <pc:sldMk cId="876355207" sldId="256"/>
+        </pc:sldMkLst>
+        <pc:picChg chg="mod">
+          <ac:chgData name="Albieri Sara" userId="647da041-e122-4c39-b456-4b0bb026a939" providerId="ADAL" clId="{13D4D05E-BEA8-4E61-99A5-0FED29BC8753}" dt="2026-07-01T09:04:30.488" v="6" actId="1037"/>
+          <ac:picMkLst>
+            <pc:docMk/>
+            <pc:sldMk cId="876355207" sldId="256"/>
+            <ac:picMk id="15" creationId="{00000000-0000-0000-0000-000000000000}"/>
+          </ac:picMkLst>
+        </pc:picChg>
+      </pc:sldChg>
+    </pc:docChg>
+  </pc:docChgLst>
+</pc:chgInfo>
+</file>
+
 <file path=ppt/charts/chart1.xml><?xml version="1.0" encoding="utf-8"?>
 <c:chartSpace xmlns:c="http://schemas.openxmlformats.org/drawingml/2006/chart" xmlns:a="http://schemas.openxmlformats.org/drawingml/2006/main" xmlns:r="http://schemas.openxmlformats.org/officeDocument/2006/relationships" xmlns:c16r2="http://schemas.microsoft.com/office/drawing/2015/06/chart">
   <c:date1904 val="1"/>
@@ -1019,7 +1049,13 @@
   <p:cSld>
     <p:spTree>
       <p:nvGrpSpPr>
-        <p:cNvPr id="1" name=""/>
+        <p:cNvPr id="1" name="">
+          <a:extLst>
+            <a:ext uri="{FF2B5EF4-FFF2-40B4-BE49-F238E27FC236}">
+              <a16:creationId xmlns:a16="http://schemas.microsoft.com/office/drawing/2014/main" id="{2D64203E-ECFB-FCBE-17FA-AB2730A72BD9}"/>
+            </a:ext>
+          </a:extLst>
+        </p:cNvPr>
         <p:cNvGrpSpPr/>
         <p:nvPr/>
       </p:nvGrpSpPr>
@@ -1033,7 +1069,13 @@
       </p:grpSpPr>
       <p:sp>
         <p:nvSpPr>
-          <p:cNvPr id="2" name="Slide Image Placeholder 1"/>
+          <p:cNvPr id="2" name="Slide Image Placeholder 1">
+            <a:extLst>
+              <a:ext uri="{FF2B5EF4-FFF2-40B4-BE49-F238E27FC236}">
+                <a16:creationId xmlns:a16="http://schemas.microsoft.com/office/drawing/2014/main" id="{4A9D92D2-9993-16F1-54CC-1EA06214EFCD}"/>
+              </a:ext>
+            </a:extLst>
+          </p:cNvPr>
           <p:cNvSpPr>
             <a:spLocks noGrp="1" noRot="1" noChangeAspect="1"/>
           </p:cNvSpPr>
@@ -1045,7 +1087,13 @@
       </p:sp>
       <p:sp>
         <p:nvSpPr>
-          <p:cNvPr id="3" name="Notes Placeholder 2"/>
+          <p:cNvPr id="3" name="Notes Placeholder 2">
+            <a:extLst>
+              <a:ext uri="{FF2B5EF4-FFF2-40B4-BE49-F238E27FC236}">
+                <a16:creationId xmlns:a16="http://schemas.microsoft.com/office/drawing/2014/main" id="{565B8017-4995-E2C2-9D48-168792E0F0F1}"/>
+              </a:ext>
+            </a:extLst>
+          </p:cNvPr>
           <p:cNvSpPr>
             <a:spLocks noGrp="1"/>
           </p:cNvSpPr>
@@ -1064,7 +1112,13 @@
       </p:sp>
       <p:sp>
         <p:nvSpPr>
-          <p:cNvPr id="4" name="Slide Number Placeholder 3"/>
+          <p:cNvPr id="4" name="Slide Number Placeholder 3">
+            <a:extLst>
+              <a:ext uri="{FF2B5EF4-FFF2-40B4-BE49-F238E27FC236}">
+                <a16:creationId xmlns:a16="http://schemas.microsoft.com/office/drawing/2014/main" id="{F97C988C-913A-8B5E-BBB3-38345A0AF390}"/>
+              </a:ext>
+            </a:extLst>
+          </p:cNvPr>
           <p:cNvSpPr>
             <a:spLocks noGrp="1"/>
           </p:cNvSpPr>
@@ -1082,6 +1136,11 @@
         </p:txBody>
       </p:sp>
     </p:spTree>
+    <p:extLst>
+      <p:ext uri="{BB962C8B-B14F-4D97-AF65-F5344CB8AC3E}">
+        <p14:creationId xmlns:p14="http://schemas.microsoft.com/office/powerpoint/2010/main" val="1795485475"/>
+      </p:ext>
+    </p:extLst>
   </p:cSld>
   <p:clrMapOvr>
     <a:masterClrMapping/>
@@ -1165,6 +1224,81 @@
 </file>
 
 <file path=ppt/notesSlides/notesSlide18.xml><?xml version="1.0" encoding="utf-8"?>
+<p:notes xmlns:a="http://schemas.openxmlformats.org/drawingml/2006/main" xmlns:r="http://schemas.openxmlformats.org/officeDocument/2006/relationships" xmlns:p="http://schemas.openxmlformats.org/presentationml/2006/main">
+  <p:cSld>
+    <p:spTree>
+      <p:nvGrpSpPr>
+        <p:cNvPr id="1" name=""/>
+        <p:cNvGrpSpPr/>
+        <p:nvPr/>
+      </p:nvGrpSpPr>
+      <p:grpSpPr>
+        <a:xfrm>
+          <a:off x="0" y="0"/>
+          <a:ext cx="0" cy="0"/>
+          <a:chOff x="0" y="0"/>
+          <a:chExt cx="0" cy="0"/>
+        </a:xfrm>
+      </p:grpSpPr>
+      <p:sp>
+        <p:nvSpPr>
+          <p:cNvPr id="2" name="Slide Image Placeholder 1"/>
+          <p:cNvSpPr>
+            <a:spLocks noGrp="1" noRot="1" noChangeAspect="1"/>
+          </p:cNvSpPr>
+          <p:nvPr>
+            <p:ph type="sldImg"/>
+          </p:nvPr>
+        </p:nvSpPr>
+        <p:spPr/>
+      </p:sp>
+      <p:sp>
+        <p:nvSpPr>
+          <p:cNvPr id="3" name="Notes Placeholder 2"/>
+          <p:cNvSpPr>
+            <a:spLocks noGrp="1"/>
+          </p:cNvSpPr>
+          <p:nvPr>
+            <p:ph type="body" idx="1"/>
+          </p:nvPr>
+        </p:nvSpPr>
+        <p:spPr/>
+        <p:txBody>
+          <a:bodyPr/>
+          <a:lstStyle/>
+          <a:p>
+            <a:endParaRPr/>
+          </a:p>
+        </p:txBody>
+      </p:sp>
+      <p:sp>
+        <p:nvSpPr>
+          <p:cNvPr id="4" name="Slide Number Placeholder 3"/>
+          <p:cNvSpPr>
+            <a:spLocks noGrp="1"/>
+          </p:cNvSpPr>
+          <p:nvPr>
+            <p:ph type="sldNum" idx="5"/>
+          </p:nvPr>
+        </p:nvSpPr>
+        <p:spPr/>
+        <p:txBody>
+          <a:bodyPr/>
+          <a:lstStyle/>
+          <a:p>
+            <a:endParaRPr/>
+          </a:p>
+        </p:txBody>
+      </p:sp>
+    </p:spTree>
+  </p:cSld>
+  <p:clrMapOvr>
+    <a:masterClrMapping/>
+  </p:clrMapOvr>
+</p:notes>
+</file>
+
+<file path=ppt/notesSlides/notesSlide19.xml><?xml version="1.0" encoding="utf-8"?>
 <p:notes xmlns:a="http://schemas.openxmlformats.org/drawingml/2006/main" xmlns:r="http://schemas.openxmlformats.org/officeDocument/2006/relationships" xmlns:p="http://schemas.openxmlformats.org/presentationml/2006/main">
   <p:cSld>
     <p:spTree>
@@ -2239,7 +2373,7 @@
         </p:blipFill>
         <p:spPr>
           <a:xfrm>
-            <a:off x="9382125" y="0"/>
+            <a:off x="9391003" y="0"/>
             <a:ext cx="2809875" cy="6858000"/>
           </a:xfrm>
           <a:prstGeom prst="rect">
@@ -7567,7 +7701,13 @@
     </p:bg>
     <p:spTree>
       <p:nvGrpSpPr>
-        <p:cNvPr id="1" name=""/>
+        <p:cNvPr id="1" name="">
+          <a:extLst>
+            <a:ext uri="{FF2B5EF4-FFF2-40B4-BE49-F238E27FC236}">
+              <a16:creationId xmlns:a16="http://schemas.microsoft.com/office/drawing/2014/main" id="{8060F0FA-A274-400E-03DD-0C3801CB26F8}"/>
+            </a:ext>
+          </a:extLst>
+        </p:cNvPr>
         <p:cNvGrpSpPr/>
         <p:nvPr/>
       </p:nvGrpSpPr>
@@ -7584,7 +7724,7 @@
           <p:cNvPr id="15" name="Rettangolo 14">
             <a:extLst>
               <a:ext uri="{FF2B5EF4-FFF2-40B4-BE49-F238E27FC236}">
-                <a16:creationId xmlns:a16="http://schemas.microsoft.com/office/drawing/2014/main" id="{35A78380-5051-4128-A3AE-30468762A799}"/>
+                <a16:creationId xmlns:a16="http://schemas.microsoft.com/office/drawing/2014/main" id="{2CA2B7AF-3F5A-EAF1-FAF8-486E0F441DB1}"/>
               </a:ext>
             </a:extLst>
           </p:cNvPr>
@@ -7634,7 +7774,7 @@
           <p:cNvPr id="2" name="Rettangolo 1">
             <a:extLst>
               <a:ext uri="{FF2B5EF4-FFF2-40B4-BE49-F238E27FC236}">
-                <a16:creationId xmlns:a16="http://schemas.microsoft.com/office/drawing/2014/main" id="{EC3927CE-00DB-4113-A6E2-6E3317C89622}"/>
+                <a16:creationId xmlns:a16="http://schemas.microsoft.com/office/drawing/2014/main" id="{771EC055-0538-6E76-2D74-2BACEC187F59}"/>
               </a:ext>
             </a:extLst>
           </p:cNvPr>
@@ -7684,7 +7824,7 @@
           <p:cNvPr id="3" name="Rettangolo 2">
             <a:extLst>
               <a:ext uri="{FF2B5EF4-FFF2-40B4-BE49-F238E27FC236}">
-                <a16:creationId xmlns:a16="http://schemas.microsoft.com/office/drawing/2014/main" id="{A76542FC-4036-485D-ACEA-0D6F589421AD}"/>
+                <a16:creationId xmlns:a16="http://schemas.microsoft.com/office/drawing/2014/main" id="{4444B725-F8C8-3BCE-65A1-347C2E1BF2C6}"/>
               </a:ext>
             </a:extLst>
           </p:cNvPr>
@@ -7734,7 +7874,7 @@
           <p:cNvPr id="4" name="Rettangolo 3">
             <a:extLst>
               <a:ext uri="{FF2B5EF4-FFF2-40B4-BE49-F238E27FC236}">
-                <a16:creationId xmlns:a16="http://schemas.microsoft.com/office/drawing/2014/main" id="{D980E73C-64D5-4ED8-9402-91AB2A8CE3CB}"/>
+                <a16:creationId xmlns:a16="http://schemas.microsoft.com/office/drawing/2014/main" id="{93AE5049-AC50-6602-36C6-BC6943C87BFF}"/>
               </a:ext>
             </a:extLst>
           </p:cNvPr>
@@ -7784,7 +7924,7 @@
           <p:cNvPr id="5" name="Rettangolo 4">
             <a:extLst>
               <a:ext uri="{FF2B5EF4-FFF2-40B4-BE49-F238E27FC236}">
-                <a16:creationId xmlns:a16="http://schemas.microsoft.com/office/drawing/2014/main" id="{2D73863F-09B1-4E6B-905E-35CE86872DB8}"/>
+                <a16:creationId xmlns:a16="http://schemas.microsoft.com/office/drawing/2014/main" id="{C793F0B2-D4C9-A926-0C87-02DAC8B9811F}"/>
               </a:ext>
             </a:extLst>
           </p:cNvPr>
@@ -7824,7 +7964,7 @@
           <p:cNvPr id="6" name="Rettangolo 5">
             <a:extLst>
               <a:ext uri="{FF2B5EF4-FFF2-40B4-BE49-F238E27FC236}">
-                <a16:creationId xmlns:a16="http://schemas.microsoft.com/office/drawing/2014/main" id="{8445B5A1-78C4-4098-B545-8EE9BF807600}"/>
+                <a16:creationId xmlns:a16="http://schemas.microsoft.com/office/drawing/2014/main" id="{95CC6010-F170-8A22-688D-5175EF0AE9AE}"/>
               </a:ext>
             </a:extLst>
           </p:cNvPr>
@@ -7966,7 +8106,7 @@
           <p:cNvPr id="7" name="Rettangolo 6">
             <a:extLst>
               <a:ext uri="{FF2B5EF4-FFF2-40B4-BE49-F238E27FC236}">
-                <a16:creationId xmlns:a16="http://schemas.microsoft.com/office/drawing/2014/main" id="{F93F2D54-50D0-4245-BF61-88DA9BA50C12}"/>
+                <a16:creationId xmlns:a16="http://schemas.microsoft.com/office/drawing/2014/main" id="{E2CB8196-65AF-F05D-7053-072A8DC85A2F}"/>
               </a:ext>
             </a:extLst>
           </p:cNvPr>
@@ -8006,7 +8146,7 @@
           <p:cNvPr id="8" name="Rettangolo 7">
             <a:extLst>
               <a:ext uri="{FF2B5EF4-FFF2-40B4-BE49-F238E27FC236}">
-                <a16:creationId xmlns:a16="http://schemas.microsoft.com/office/drawing/2014/main" id="{9F3442EE-79C5-4169-9B39-07572F7FE15E}"/>
+                <a16:creationId xmlns:a16="http://schemas.microsoft.com/office/drawing/2014/main" id="{CAD3F993-1984-032E-ED94-4BD619DE9BE3}"/>
               </a:ext>
             </a:extLst>
           </p:cNvPr>
@@ -8056,7 +8196,7 @@
           <p:cNvPr id="9" name="Rettangolo 8">
             <a:extLst>
               <a:ext uri="{FF2B5EF4-FFF2-40B4-BE49-F238E27FC236}">
-                <a16:creationId xmlns:a16="http://schemas.microsoft.com/office/drawing/2014/main" id="{F8B931F3-A78F-4409-8394-296BC9418BF5}"/>
+                <a16:creationId xmlns:a16="http://schemas.microsoft.com/office/drawing/2014/main" id="{D128467D-B8EA-4AF2-329A-A827EC06359B}"/>
               </a:ext>
             </a:extLst>
           </p:cNvPr>
@@ -8096,7 +8236,7 @@
           <p:cNvPr id="10" name="Rettangolo 9">
             <a:extLst>
               <a:ext uri="{FF2B5EF4-FFF2-40B4-BE49-F238E27FC236}">
-                <a16:creationId xmlns:a16="http://schemas.microsoft.com/office/drawing/2014/main" id="{3DD06E88-30BE-4677-B812-E0B39FA156C2}"/>
+                <a16:creationId xmlns:a16="http://schemas.microsoft.com/office/drawing/2014/main" id="{49B244BB-C80C-0A2D-A579-FED2FD9213BD}"/>
               </a:ext>
             </a:extLst>
           </p:cNvPr>
@@ -8146,7 +8286,7 @@
           <p:cNvPr id="11" name="Rettangolo 10">
             <a:extLst>
               <a:ext uri="{FF2B5EF4-FFF2-40B4-BE49-F238E27FC236}">
-                <a16:creationId xmlns:a16="http://schemas.microsoft.com/office/drawing/2014/main" id="{CAB31997-D87C-4529-8846-38955F638396}"/>
+                <a16:creationId xmlns:a16="http://schemas.microsoft.com/office/drawing/2014/main" id="{C52BD232-855F-5E7A-7402-40B60CECD464}"/>
               </a:ext>
             </a:extLst>
           </p:cNvPr>
@@ -8186,7 +8326,7 @@
           <p:cNvPr id="12" name="Rettangolo 11">
             <a:extLst>
               <a:ext uri="{FF2B5EF4-FFF2-40B4-BE49-F238E27FC236}">
-                <a16:creationId xmlns:a16="http://schemas.microsoft.com/office/drawing/2014/main" id="{E97B53AE-6141-472F-A847-00AE70E10FF1}"/>
+                <a16:creationId xmlns:a16="http://schemas.microsoft.com/office/drawing/2014/main" id="{5B0FBE7B-9DC7-8466-BF55-D69B6AF81D54}"/>
               </a:ext>
             </a:extLst>
           </p:cNvPr>
@@ -8236,7 +8376,7 @@
           <p:cNvPr id="13" name="Rettangolo 12">
             <a:extLst>
               <a:ext uri="{FF2B5EF4-FFF2-40B4-BE49-F238E27FC236}">
-                <a16:creationId xmlns:a16="http://schemas.microsoft.com/office/drawing/2014/main" id="{87EEAF7F-D742-48C5-9074-86D6CE80647C}"/>
+                <a16:creationId xmlns:a16="http://schemas.microsoft.com/office/drawing/2014/main" id="{5027F030-AC0E-CBDE-A8AF-0861C3762E67}"/>
               </a:ext>
             </a:extLst>
           </p:cNvPr>
@@ -8276,7 +8416,7 @@
           <p:cNvPr id="14" name="Rettangolo 13">
             <a:extLst>
               <a:ext uri="{FF2B5EF4-FFF2-40B4-BE49-F238E27FC236}">
-                <a16:creationId xmlns:a16="http://schemas.microsoft.com/office/drawing/2014/main" id="{618E101D-20AC-4066-AF4C-1807AE10B958}"/>
+                <a16:creationId xmlns:a16="http://schemas.microsoft.com/office/drawing/2014/main" id="{9C40E4D4-6455-FA72-9F75-07FF6BB93FBD}"/>
               </a:ext>
             </a:extLst>
           </p:cNvPr>
@@ -8324,7 +8464,7 @@
     </p:spTree>
     <p:extLst>
       <p:ext uri="{BB962C8B-B14F-4D97-AF65-F5344CB8AC3E}">
-        <p14:creationId xmlns:p14="http://schemas.microsoft.com/office/powerpoint/2010/main" val="23148497"/>
+        <p14:creationId xmlns:p14="http://schemas.microsoft.com/office/powerpoint/2010/main" val="1561553183"/>
       </p:ext>
     </p:extLst>
   </p:cSld>
@@ -8361,10 +8501,10 @@
       </p:grpSpPr>
       <p:sp>
         <p:nvSpPr>
-          <p:cNvPr id="11" name="Rettangolo 10">
-            <a:extLst>
-              <a:ext uri="{FF2B5EF4-FFF2-40B4-BE49-F238E27FC236}">
-                <a16:creationId xmlns:a16="http://schemas.microsoft.com/office/drawing/2014/main" id="{78EEFBDA-9ABB-4E5F-9805-62C3A2014BAE}"/>
+          <p:cNvPr id="15" name="Rettangolo 14">
+            <a:extLst>
+              <a:ext uri="{FF2B5EF4-FFF2-40B4-BE49-F238E27FC236}">
+                <a16:creationId xmlns:a16="http://schemas.microsoft.com/office/drawing/2014/main" id="{35A78380-5051-4128-A3AE-30468762A799}"/>
               </a:ext>
             </a:extLst>
           </p:cNvPr>
@@ -8391,7 +8531,7 @@
           <a:bodyPr/>
           <a:lstStyle/>
           <a:p>
-            <a:pPr algn="l">
+            <a:pPr>
               <a:defRPr sz="3000" b="1">
                 <a:solidFill>
                   <a:srgbClr val="0F172A"/>
@@ -8399,13 +8539,26 @@
               </a:defRPr>
             </a:pPr>
             <a:r>
-              <a:rPr sz="3000" b="1">
-                <a:solidFill>
-                  <a:srgbClr val="0F172A"/>
-                </a:solidFill>
-              </a:rPr>
-              <a:t>Esempio: Itachi Uchiha</a:t>
-            </a:r>
+              <a:rPr lang="it-IT" sz="3000" b="1" dirty="0" err="1"/>
+              <a:t>Metamodello</a:t>
+            </a:r>
+            <a:r>
+              <a:rPr lang="it-IT" sz="3000" b="1" dirty="0"/>
+              <a:t> e T-Box: </a:t>
+            </a:r>
+            <a:r>
+              <a:rPr lang="it-IT" sz="3000" b="1" dirty="0" err="1"/>
+              <a:t>AniManga</a:t>
+            </a:r>
+            <a:r>
+              <a:rPr lang="it-IT" sz="3000" b="1" dirty="0"/>
+              <a:t> O-KG</a:t>
+            </a:r>
+            <a:endParaRPr sz="3000" b="1" dirty="0">
+              <a:solidFill>
+                <a:srgbClr val="0F172A"/>
+              </a:solidFill>
+            </a:endParaRPr>
           </a:p>
         </p:txBody>
       </p:sp>
@@ -8414,7 +8567,7 @@
           <p:cNvPr id="2" name="Rettangolo 1">
             <a:extLst>
               <a:ext uri="{FF2B5EF4-FFF2-40B4-BE49-F238E27FC236}">
-                <a16:creationId xmlns:a16="http://schemas.microsoft.com/office/drawing/2014/main" id="{1523823A-5763-4810-A22D-C68840FF7AE6}"/>
+                <a16:creationId xmlns:a16="http://schemas.microsoft.com/office/drawing/2014/main" id="{EC3927CE-00DB-4113-A6E2-6E3317C89622}"/>
               </a:ext>
             </a:extLst>
           </p:cNvPr>
@@ -8426,22 +8579,22 @@
         <p:spPr>
           <a:xfrm>
             <a:off x="400050" y="1123950"/>
-            <a:ext cx="8572500" cy="609600"/>
-          </a:xfrm>
-          <a:prstGeom prst="rect">
-            <a:avLst/>
-          </a:prstGeom>
-          <a:noFill/>
-          <a:ln w="0">
-            <a:noFill/>
-            <a:prstDash val="solid"/>
-          </a:ln>
-        </p:spPr>
-        <p:txBody>
-          <a:bodyPr/>
-          <a:lstStyle/>
-          <a:p>
-            <a:pPr algn="l">
+            <a:ext cx="10363200" cy="609600"/>
+          </a:xfrm>
+          <a:prstGeom prst="rect">
+            <a:avLst/>
+          </a:prstGeom>
+          <a:noFill/>
+          <a:ln w="0">
+            <a:noFill/>
+            <a:prstDash val="solid"/>
+          </a:ln>
+        </p:spPr>
+        <p:txBody>
+          <a:bodyPr/>
+          <a:lstStyle/>
+          <a:p>
+            <a:pPr>
               <a:defRPr sz="1500" b="0">
                 <a:solidFill>
                   <a:srgbClr val="475569"/>
@@ -8449,13 +8602,14 @@
               </a:defRPr>
             </a:pPr>
             <a:r>
-              <a:rPr sz="1500" b="0">
-                <a:solidFill>
-                  <a:srgbClr val="475569"/>
-                </a:solidFill>
-              </a:rPr>
-              <a:t>La tripla finale nasce da una proposta LLM verificata, non da una generazione automatica non controllata.</a:t>
-            </a:r>
+              <a:rPr lang="it-IT" sz="1500" dirty="0"/>
+              <a:t>Il nostro arricchimento non si limita a produrre triple (A-Box), ma definisce un vero e proprio schema ontologico.</a:t>
+            </a:r>
+            <a:endParaRPr sz="1500" b="0" dirty="0">
+              <a:solidFill>
+                <a:srgbClr val="475569"/>
+              </a:solidFill>
+            </a:endParaRPr>
           </a:p>
         </p:txBody>
       </p:sp>
@@ -8464,7 +8618,7 @@
           <p:cNvPr id="3" name="Rettangolo 2">
             <a:extLst>
               <a:ext uri="{FF2B5EF4-FFF2-40B4-BE49-F238E27FC236}">
-                <a16:creationId xmlns:a16="http://schemas.microsoft.com/office/drawing/2014/main" id="{CD898ADA-0AA7-4BDF-A6A9-FE87396A8928}"/>
+                <a16:creationId xmlns:a16="http://schemas.microsoft.com/office/drawing/2014/main" id="{A76542FC-4036-485D-ACEA-0D6F589421AD}"/>
               </a:ext>
             </a:extLst>
           </p:cNvPr>
@@ -8514,7 +8668,7 @@
           <p:cNvPr id="4" name="Rettangolo 3">
             <a:extLst>
               <a:ext uri="{FF2B5EF4-FFF2-40B4-BE49-F238E27FC236}">
-                <a16:creationId xmlns:a16="http://schemas.microsoft.com/office/drawing/2014/main" id="{1CF2EB58-6E23-471E-9A4D-28028695F816}"/>
+                <a16:creationId xmlns:a16="http://schemas.microsoft.com/office/drawing/2014/main" id="{D980E73C-64D5-4ED8-9402-91AB2A8CE3CB}"/>
               </a:ext>
             </a:extLst>
           </p:cNvPr>
@@ -8554,29 +8708,29 @@
                   <a:srgbClr val="475569"/>
                 </a:solidFill>
               </a:rPr>
-              <a:t>17</a:t>
-            </a:r>
-          </a:p>
-        </p:txBody>
-      </p:sp>
-      <p:sp>
-        <p:nvSpPr>
-          <p:cNvPr id="5" name="Rettangolo 4">
-            <a:extLst>
-              <a:ext uri="{FF2B5EF4-FFF2-40B4-BE49-F238E27FC236}">
-                <a16:creationId xmlns:a16="http://schemas.microsoft.com/office/drawing/2014/main" id="{FBBDA75E-45A6-4C43-8712-6056C4B7A569}"/>
-              </a:ext>
-            </a:extLst>
-          </p:cNvPr>
-          <p:cNvSpPr>
-            <a:spLocks noGrp="1"/>
-          </p:cNvSpPr>
-          <p:nvPr/>
-        </p:nvSpPr>
-        <p:spPr>
-          <a:xfrm>
-            <a:off x="571500" y="2076450"/>
-            <a:ext cx="4095750" cy="3124200"/>
+              <a:t>16</a:t>
+            </a:r>
+          </a:p>
+        </p:txBody>
+      </p:sp>
+      <p:sp>
+        <p:nvSpPr>
+          <p:cNvPr id="7" name="Rettangolo 6">
+            <a:extLst>
+              <a:ext uri="{FF2B5EF4-FFF2-40B4-BE49-F238E27FC236}">
+                <a16:creationId xmlns:a16="http://schemas.microsoft.com/office/drawing/2014/main" id="{F93F2D54-50D0-4245-BF61-88DA9BA50C12}"/>
+              </a:ext>
+            </a:extLst>
+          </p:cNvPr>
+          <p:cNvSpPr>
+            <a:spLocks noGrp="1"/>
+          </p:cNvSpPr>
+          <p:nvPr/>
+        </p:nvSpPr>
+        <p:spPr>
+          <a:xfrm>
+            <a:off x="400050" y="1732996"/>
+            <a:ext cx="9126244" cy="2819400"/>
           </a:xfrm>
           <a:prstGeom prst="rect">
             <a:avLst/>
@@ -8601,216 +8755,32 @@
       </p:sp>
       <p:sp>
         <p:nvSpPr>
-          <p:cNvPr id="6" name="Rettangolo 5">
-            <a:extLst>
-              <a:ext uri="{FF2B5EF4-FFF2-40B4-BE49-F238E27FC236}">
-                <a16:creationId xmlns:a16="http://schemas.microsoft.com/office/drawing/2014/main" id="{4F694E7C-88C9-47C1-AC49-47B51B8BD4F5}"/>
-              </a:ext>
-            </a:extLst>
-          </p:cNvPr>
-          <p:cNvSpPr>
-            <a:spLocks noGrp="1"/>
-          </p:cNvSpPr>
-          <p:nvPr/>
-        </p:nvSpPr>
-        <p:spPr>
-          <a:xfrm>
-            <a:off x="914400" y="2400300"/>
-            <a:ext cx="2476500" cy="323850"/>
-          </a:xfrm>
-          <a:prstGeom prst="rect">
-            <a:avLst/>
-          </a:prstGeom>
-          <a:noFill/>
-          <a:ln w="0">
-            <a:noFill/>
-            <a:prstDash val="solid"/>
-          </a:ln>
-        </p:spPr>
-        <p:txBody>
-          <a:bodyPr/>
-          <a:lstStyle/>
-          <a:p>
-            <a:pPr algn="l">
-              <a:defRPr sz="2100" b="1">
-                <a:solidFill>
-                  <a:srgbClr val="0F172A"/>
-                </a:solidFill>
-              </a:defRPr>
-            </a:pPr>
-            <a:r>
-              <a:rPr sz="2100" b="1">
-                <a:solidFill>
-                  <a:srgbClr val="0F172A"/>
-                </a:solidFill>
-              </a:rPr>
-              <a:t>Interpretazione</a:t>
-            </a:r>
-          </a:p>
-        </p:txBody>
-      </p:sp>
-      <p:sp>
-        <p:nvSpPr>
-          <p:cNvPr id="7" name="Rettangolo 6">
-            <a:extLst>
-              <a:ext uri="{FF2B5EF4-FFF2-40B4-BE49-F238E27FC236}">
-                <a16:creationId xmlns:a16="http://schemas.microsoft.com/office/drawing/2014/main" id="{7D0774F6-9CF8-414B-B937-3266E5B7BA22}"/>
-              </a:ext>
-            </a:extLst>
-          </p:cNvPr>
-          <p:cNvSpPr>
-            <a:spLocks noGrp="1"/>
-          </p:cNvSpPr>
-          <p:nvPr/>
-        </p:nvSpPr>
-        <p:spPr>
-          <a:xfrm>
-            <a:off x="914400" y="3048000"/>
-            <a:ext cx="3143250" cy="1085850"/>
-          </a:xfrm>
-          <a:prstGeom prst="rect">
-            <a:avLst/>
-          </a:prstGeom>
-          <a:noFill/>
-          <a:ln w="0">
-            <a:noFill/>
-            <a:prstDash val="solid"/>
-          </a:ln>
-        </p:spPr>
-        <p:txBody>
-          <a:bodyPr/>
-          <a:lstStyle/>
-          <a:p>
-            <a:pPr algn="l">
-              <a:defRPr sz="2325" b="1">
-                <a:solidFill>
-                  <a:srgbClr val="F43F5E"/>
-                </a:solidFill>
-              </a:defRPr>
-            </a:pPr>
-            <a:r>
-              <a:rPr sz="2325" b="1">
-                <a:solidFill>
-                  <a:srgbClr val="F43F5E"/>
-                </a:solidFill>
-              </a:rPr>
-              <a:t>Itachi Uchiha</a:t>
-            </a:r>
-          </a:p>
-          <a:p>
-            <a:pPr algn="l">
-              <a:defRPr sz="2325" b="1">
-                <a:solidFill>
-                  <a:srgbClr val="F43F5E"/>
-                </a:solidFill>
-              </a:defRPr>
-            </a:pPr>
-            <a:r>
-              <a:rPr sz="2325" b="1">
-                <a:solidFill>
-                  <a:srgbClr val="F43F5E"/>
-                </a:solidFill>
-              </a:rPr>
-              <a:t>-&gt; tragic hero</a:t>
-            </a:r>
-          </a:p>
-          <a:p>
-            <a:pPr algn="l">
-              <a:defRPr sz="2325" b="1">
-                <a:solidFill>
-                  <a:srgbClr val="F43F5E"/>
-                </a:solidFill>
-              </a:defRPr>
-            </a:pPr>
-            <a:r>
-              <a:rPr sz="2325" b="1">
-                <a:solidFill>
-                  <a:srgbClr val="F43F5E"/>
-                </a:solidFill>
-              </a:rPr>
-              <a:t>-&gt; sacrificial shinobi</a:t>
-            </a:r>
-          </a:p>
-        </p:txBody>
-      </p:sp>
-      <p:sp>
-        <p:nvSpPr>
-          <p:cNvPr id="8" name="Rettangolo 7">
-            <a:extLst>
-              <a:ext uri="{FF2B5EF4-FFF2-40B4-BE49-F238E27FC236}">
-                <a16:creationId xmlns:a16="http://schemas.microsoft.com/office/drawing/2014/main" id="{40517527-6206-4501-A825-CB234D49E9E3}"/>
-              </a:ext>
-            </a:extLst>
-          </p:cNvPr>
-          <p:cNvSpPr>
-            <a:spLocks noGrp="1"/>
-          </p:cNvSpPr>
-          <p:nvPr/>
-        </p:nvSpPr>
-        <p:spPr>
-          <a:xfrm>
-            <a:off x="914400" y="4400550"/>
-            <a:ext cx="3048000" cy="419100"/>
-          </a:xfrm>
-          <a:prstGeom prst="rect">
-            <a:avLst/>
-          </a:prstGeom>
-          <a:noFill/>
-          <a:ln w="0">
-            <a:noFill/>
-            <a:prstDash val="solid"/>
-          </a:ln>
-        </p:spPr>
-        <p:txBody>
-          <a:bodyPr/>
-          <a:lstStyle/>
-          <a:p>
-            <a:pPr algn="l">
-              <a:defRPr sz="1425" b="0">
-                <a:solidFill>
-                  <a:srgbClr val="475569"/>
-                </a:solidFill>
-              </a:defRPr>
-            </a:pPr>
-            <a:r>
-              <a:rPr sz="1425" b="0">
-                <a:solidFill>
-                  <a:srgbClr val="475569"/>
-                </a:solidFill>
-              </a:rPr>
-              <a:t>tragic hero viene riusato; sacrificial shinobi diventa risorsa locale.</a:t>
-            </a:r>
-          </a:p>
-        </p:txBody>
-      </p:sp>
-      <p:sp>
-        <p:nvSpPr>
           <p:cNvPr id="9" name="Rettangolo 8">
             <a:extLst>
               <a:ext uri="{FF2B5EF4-FFF2-40B4-BE49-F238E27FC236}">
-                <a16:creationId xmlns:a16="http://schemas.microsoft.com/office/drawing/2014/main" id="{9D7999D6-A59D-4B9D-9AC5-C55FC2F872BE}"/>
-              </a:ext>
-            </a:extLst>
-          </p:cNvPr>
-          <p:cNvSpPr>
-            <a:spLocks noGrp="1"/>
-          </p:cNvSpPr>
-          <p:nvPr/>
-        </p:nvSpPr>
-        <p:spPr>
-          <a:xfrm>
-            <a:off x="5619750" y="2076450"/>
-            <a:ext cx="5334000" cy="3124200"/>
+                <a16:creationId xmlns:a16="http://schemas.microsoft.com/office/drawing/2014/main" id="{F8B931F3-A78F-4409-8394-296BC9418BF5}"/>
+              </a:ext>
+            </a:extLst>
+          </p:cNvPr>
+          <p:cNvSpPr>
+            <a:spLocks noGrp="1"/>
+          </p:cNvSpPr>
+          <p:nvPr/>
+        </p:nvSpPr>
+        <p:spPr>
+          <a:xfrm>
+            <a:off x="970485" y="2438215"/>
+            <a:ext cx="152400" cy="152400"/>
           </a:xfrm>
           <a:prstGeom prst="rect">
             <a:avLst/>
           </a:prstGeom>
           <a:solidFill>
-            <a:srgbClr val="0F172A"/>
+            <a:srgbClr val="38BDF8"/>
           </a:solidFill>
           <a:ln w="9525">
             <a:solidFill>
-              <a:srgbClr val="0F172A"/>
+              <a:srgbClr val="38BDF8"/>
             </a:solidFill>
             <a:prstDash val="solid"/>
           </a:ln>
@@ -8828,19 +8798,503 @@
           <p:cNvPr id="10" name="Rettangolo 9">
             <a:extLst>
               <a:ext uri="{FF2B5EF4-FFF2-40B4-BE49-F238E27FC236}">
-                <a16:creationId xmlns:a16="http://schemas.microsoft.com/office/drawing/2014/main" id="{6B06217A-8DF6-435B-8061-8D146D5ED05B}"/>
-              </a:ext>
-            </a:extLst>
-          </p:cNvPr>
-          <p:cNvSpPr>
-            <a:spLocks noGrp="1"/>
-          </p:cNvSpPr>
-          <p:nvPr/>
-        </p:nvSpPr>
-        <p:spPr>
-          <a:xfrm>
-            <a:off x="5905500" y="2343150"/>
-            <a:ext cx="4762500" cy="2590800"/>
+                <a16:creationId xmlns:a16="http://schemas.microsoft.com/office/drawing/2014/main" id="{3DD06E88-30BE-4677-B812-E0B39FA156C2}"/>
+              </a:ext>
+            </a:extLst>
+          </p:cNvPr>
+          <p:cNvSpPr>
+            <a:spLocks noGrp="1"/>
+          </p:cNvSpPr>
+          <p:nvPr/>
+        </p:nvSpPr>
+        <p:spPr>
+          <a:xfrm>
+            <a:off x="1307652" y="2354708"/>
+            <a:ext cx="7931183" cy="457200"/>
+          </a:xfrm>
+          <a:prstGeom prst="rect">
+            <a:avLst/>
+          </a:prstGeom>
+          <a:noFill/>
+          <a:ln w="0">
+            <a:noFill/>
+            <a:prstDash val="solid"/>
+          </a:ln>
+        </p:spPr>
+        <p:txBody>
+          <a:bodyPr/>
+          <a:lstStyle/>
+          <a:p>
+            <a:pPr>
+              <a:defRPr sz="1575" b="0">
+                <a:solidFill>
+                  <a:srgbClr val="0F172A"/>
+                </a:solidFill>
+              </a:defRPr>
+            </a:pPr>
+            <a:r>
+              <a:rPr lang="it-IT" sz="1575" b="1" dirty="0"/>
+              <a:t>La Classe Core:</a:t>
+            </a:r>
+            <a:r>
+              <a:rPr lang="it-IT" sz="1575" dirty="0"/>
+              <a:t> Introduciamo </a:t>
+            </a:r>
+            <a:r>
+              <a:rPr lang="it-IT" sz="1575" dirty="0" err="1"/>
+              <a:t>am:Character</a:t>
+            </a:r>
+            <a:r>
+              <a:rPr lang="it-IT" sz="1575" dirty="0"/>
+              <a:t> come classe principale.</a:t>
+            </a:r>
+            <a:endParaRPr sz="1575" b="0" dirty="0">
+              <a:solidFill>
+                <a:srgbClr val="0F172A"/>
+              </a:solidFill>
+            </a:endParaRPr>
+          </a:p>
+        </p:txBody>
+      </p:sp>
+      <p:sp>
+        <p:nvSpPr>
+          <p:cNvPr id="11" name="Rettangolo 10">
+            <a:extLst>
+              <a:ext uri="{FF2B5EF4-FFF2-40B4-BE49-F238E27FC236}">
+                <a16:creationId xmlns:a16="http://schemas.microsoft.com/office/drawing/2014/main" id="{CAB31997-D87C-4529-8846-38955F638396}"/>
+              </a:ext>
+            </a:extLst>
+          </p:cNvPr>
+          <p:cNvSpPr>
+            <a:spLocks noGrp="1"/>
+          </p:cNvSpPr>
+          <p:nvPr/>
+        </p:nvSpPr>
+        <p:spPr>
+          <a:xfrm>
+            <a:off x="970485" y="3004767"/>
+            <a:ext cx="152400" cy="152400"/>
+          </a:xfrm>
+          <a:prstGeom prst="rect">
+            <a:avLst/>
+          </a:prstGeom>
+          <a:solidFill>
+            <a:srgbClr val="38BDF8"/>
+          </a:solidFill>
+          <a:ln w="9525">
+            <a:solidFill>
+              <a:srgbClr val="38BDF8"/>
+            </a:solidFill>
+            <a:prstDash val="solid"/>
+          </a:ln>
+        </p:spPr>
+        <p:txBody>
+          <a:bodyPr/>
+          <a:lstStyle/>
+          <a:p>
+            <a:endParaRPr lang="it-IT"/>
+          </a:p>
+        </p:txBody>
+      </p:sp>
+      <p:sp>
+        <p:nvSpPr>
+          <p:cNvPr id="12" name="Rettangolo 11">
+            <a:extLst>
+              <a:ext uri="{FF2B5EF4-FFF2-40B4-BE49-F238E27FC236}">
+                <a16:creationId xmlns:a16="http://schemas.microsoft.com/office/drawing/2014/main" id="{E97B53AE-6141-472F-A847-00AE70E10FF1}"/>
+              </a:ext>
+            </a:extLst>
+          </p:cNvPr>
+          <p:cNvSpPr>
+            <a:spLocks noGrp="1"/>
+          </p:cNvSpPr>
+          <p:nvPr/>
+        </p:nvSpPr>
+        <p:spPr>
+          <a:xfrm>
+            <a:off x="1325730" y="2847605"/>
+            <a:ext cx="8200564" cy="609600"/>
+          </a:xfrm>
+          <a:prstGeom prst="rect">
+            <a:avLst/>
+          </a:prstGeom>
+          <a:noFill/>
+          <a:ln w="0">
+            <a:noFill/>
+            <a:prstDash val="solid"/>
+          </a:ln>
+        </p:spPr>
+        <p:txBody>
+          <a:bodyPr/>
+          <a:lstStyle/>
+          <a:p>
+            <a:pPr>
+              <a:defRPr sz="1575" b="0">
+                <a:solidFill>
+                  <a:srgbClr val="0F172A"/>
+                </a:solidFill>
+              </a:defRPr>
+            </a:pPr>
+            <a:r>
+              <a:rPr lang="it-IT" sz="1575" b="1" dirty="0"/>
+              <a:t>Il Ponte </a:t>
+            </a:r>
+            <a:r>
+              <a:rPr lang="it-IT" sz="1575" b="1" dirty="0" err="1"/>
+              <a:t>Wikidata</a:t>
+            </a:r>
+            <a:r>
+              <a:rPr lang="it-IT" sz="1575" b="1" dirty="0"/>
+              <a:t>:</a:t>
+            </a:r>
+            <a:r>
+              <a:rPr lang="it-IT" sz="1575" dirty="0"/>
+              <a:t> </a:t>
+            </a:r>
+            <a:r>
+              <a:rPr lang="it-IT" sz="1575" dirty="0" err="1"/>
+              <a:t>am:Character</a:t>
+            </a:r>
+            <a:r>
+              <a:rPr lang="it-IT" sz="1575" dirty="0"/>
+              <a:t> è definita come </a:t>
+            </a:r>
+            <a:r>
+              <a:rPr lang="it-IT" sz="1575" dirty="0" err="1"/>
+              <a:t>rdfs:subClassOf</a:t>
+            </a:r>
+            <a:r>
+              <a:rPr lang="it-IT" sz="1575" dirty="0"/>
+              <a:t> wd:Q95074 (</a:t>
+            </a:r>
+            <a:r>
+              <a:rPr lang="it-IT" sz="1575" i="1" dirty="0"/>
+              <a:t>personaggio immaginario</a:t>
+            </a:r>
+            <a:r>
+              <a:rPr lang="it-IT" sz="1575" dirty="0"/>
+              <a:t>). Questo garantisce interoperabilità e retrocompatibilità globale. </a:t>
+            </a:r>
+            <a:endParaRPr sz="1575" b="0" dirty="0">
+              <a:solidFill>
+                <a:srgbClr val="0F172A"/>
+              </a:solidFill>
+            </a:endParaRPr>
+          </a:p>
+        </p:txBody>
+      </p:sp>
+      <p:sp>
+        <p:nvSpPr>
+          <p:cNvPr id="13" name="Rettangolo 12">
+            <a:extLst>
+              <a:ext uri="{FF2B5EF4-FFF2-40B4-BE49-F238E27FC236}">
+                <a16:creationId xmlns:a16="http://schemas.microsoft.com/office/drawing/2014/main" id="{87EEAF7F-D742-48C5-9074-86D6CE80647C}"/>
+              </a:ext>
+            </a:extLst>
+          </p:cNvPr>
+          <p:cNvSpPr>
+            <a:spLocks noGrp="1"/>
+          </p:cNvSpPr>
+          <p:nvPr/>
+        </p:nvSpPr>
+        <p:spPr>
+          <a:xfrm>
+            <a:off x="970485" y="3633417"/>
+            <a:ext cx="152400" cy="152400"/>
+          </a:xfrm>
+          <a:prstGeom prst="rect">
+            <a:avLst/>
+          </a:prstGeom>
+          <a:solidFill>
+            <a:srgbClr val="38BDF8"/>
+          </a:solidFill>
+          <a:ln w="9525">
+            <a:solidFill>
+              <a:srgbClr val="38BDF8"/>
+            </a:solidFill>
+            <a:prstDash val="solid"/>
+          </a:ln>
+        </p:spPr>
+        <p:txBody>
+          <a:bodyPr/>
+          <a:lstStyle/>
+          <a:p>
+            <a:endParaRPr lang="it-IT"/>
+          </a:p>
+        </p:txBody>
+      </p:sp>
+      <p:sp>
+        <p:nvSpPr>
+          <p:cNvPr id="14" name="Rettangolo 13">
+            <a:extLst>
+              <a:ext uri="{FF2B5EF4-FFF2-40B4-BE49-F238E27FC236}">
+                <a16:creationId xmlns:a16="http://schemas.microsoft.com/office/drawing/2014/main" id="{618E101D-20AC-4066-AF4C-1807AE10B958}"/>
+              </a:ext>
+            </a:extLst>
+          </p:cNvPr>
+          <p:cNvSpPr>
+            <a:spLocks noGrp="1"/>
+          </p:cNvSpPr>
+          <p:nvPr/>
+        </p:nvSpPr>
+        <p:spPr>
+          <a:xfrm>
+            <a:off x="1325730" y="3566053"/>
+            <a:ext cx="7931182" cy="609600"/>
+          </a:xfrm>
+          <a:prstGeom prst="rect">
+            <a:avLst/>
+          </a:prstGeom>
+          <a:noFill/>
+          <a:ln w="0">
+            <a:noFill/>
+            <a:prstDash val="solid"/>
+          </a:ln>
+        </p:spPr>
+        <p:txBody>
+          <a:bodyPr/>
+          <a:lstStyle/>
+          <a:p>
+            <a:pPr>
+              <a:defRPr sz="1575" b="0">
+                <a:solidFill>
+                  <a:srgbClr val="0F172A"/>
+                </a:solidFill>
+              </a:defRPr>
+            </a:pPr>
+            <a:r>
+              <a:rPr lang="it-IT" sz="1575" b="1" dirty="0"/>
+              <a:t>Estensione:</a:t>
+            </a:r>
+            <a:r>
+              <a:rPr lang="it-IT" sz="1575" dirty="0"/>
+              <a:t> Le istanze mantengono il loro QID </a:t>
+            </a:r>
+            <a:r>
+              <a:rPr lang="it-IT" sz="1575" dirty="0" err="1"/>
+              <a:t>Wikidata</a:t>
+            </a:r>
+            <a:r>
+              <a:rPr lang="it-IT" sz="1575" dirty="0"/>
+              <a:t> originario, ma acquisiscono le nuove proprietà </a:t>
+            </a:r>
+            <a:r>
+              <a:rPr lang="it-IT" sz="1575" dirty="0" err="1"/>
+              <a:t>hasGeneralArchetype</a:t>
+            </a:r>
+            <a:r>
+              <a:rPr lang="it-IT" sz="1575" dirty="0"/>
+              <a:t> e </a:t>
+            </a:r>
+            <a:r>
+              <a:rPr lang="it-IT" sz="1575" dirty="0" err="1"/>
+              <a:t>hasJapaneseArchetype</a:t>
+            </a:r>
+            <a:r>
+              <a:rPr lang="it-IT" sz="1575" dirty="0"/>
+              <a:t> definite nella nostra ontologia.</a:t>
+            </a:r>
+            <a:endParaRPr sz="1575" b="0" dirty="0">
+              <a:solidFill>
+                <a:srgbClr val="0F172A"/>
+              </a:solidFill>
+            </a:endParaRPr>
+          </a:p>
+        </p:txBody>
+      </p:sp>
+    </p:spTree>
+    <p:extLst>
+      <p:ext uri="{BB962C8B-B14F-4D97-AF65-F5344CB8AC3E}">
+        <p14:creationId xmlns:p14="http://schemas.microsoft.com/office/powerpoint/2010/main" val="23148497"/>
+      </p:ext>
+    </p:extLst>
+  </p:cSld>
+  <p:clrMapOvr>
+    <a:masterClrMapping/>
+  </p:clrMapOvr>
+</p:sld>
+</file>
+
+<file path=ppt/slides/slide18.xml><?xml version="1.0" encoding="utf-8"?>
+<p:sld xmlns:a="http://schemas.openxmlformats.org/drawingml/2006/main" xmlns:r="http://schemas.openxmlformats.org/officeDocument/2006/relationships" xmlns:p="http://schemas.openxmlformats.org/presentationml/2006/main">
+  <p:cSld>
+    <p:bg>
+      <p:bgPr>
+        <a:solidFill>
+          <a:srgbClr val="FFFFFF"/>
+        </a:solidFill>
+        <a:effectLst/>
+      </p:bgPr>
+    </p:bg>
+    <p:spTree>
+      <p:nvGrpSpPr>
+        <p:cNvPr id="1" name=""/>
+        <p:cNvGrpSpPr/>
+        <p:nvPr/>
+      </p:nvGrpSpPr>
+      <p:grpSpPr>
+        <a:xfrm>
+          <a:off x="0" y="0"/>
+          <a:ext cx="0" cy="0"/>
+          <a:chOff x="0" y="0"/>
+          <a:chExt cx="0" cy="0"/>
+        </a:xfrm>
+      </p:grpSpPr>
+      <p:sp>
+        <p:nvSpPr>
+          <p:cNvPr id="11" name="Rettangolo 10">
+            <a:extLst>
+              <a:ext uri="{FF2B5EF4-FFF2-40B4-BE49-F238E27FC236}">
+                <a16:creationId xmlns:a16="http://schemas.microsoft.com/office/drawing/2014/main" id="{78EEFBDA-9ABB-4E5F-9805-62C3A2014BAE}"/>
+              </a:ext>
+            </a:extLst>
+          </p:cNvPr>
+          <p:cNvSpPr>
+            <a:spLocks noGrp="1"/>
+          </p:cNvSpPr>
+          <p:nvPr/>
+        </p:nvSpPr>
+        <p:spPr>
+          <a:xfrm>
+            <a:off x="400050" y="361950"/>
+            <a:ext cx="8001000" cy="723900"/>
+          </a:xfrm>
+          <a:prstGeom prst="rect">
+            <a:avLst/>
+          </a:prstGeom>
+          <a:noFill/>
+          <a:ln w="0">
+            <a:noFill/>
+            <a:prstDash val="solid"/>
+          </a:ln>
+        </p:spPr>
+        <p:txBody>
+          <a:bodyPr/>
+          <a:lstStyle/>
+          <a:p>
+            <a:pPr>
+              <a:defRPr sz="3000" b="1">
+                <a:solidFill>
+                  <a:srgbClr val="0F172A"/>
+                </a:solidFill>
+              </a:defRPr>
+            </a:pPr>
+            <a:r>
+              <a:rPr lang="it-IT" sz="3000" b="1" dirty="0"/>
+              <a:t>Esempio RDF: </a:t>
+            </a:r>
+            <a:r>
+              <a:rPr lang="it-IT" sz="3000" b="1" dirty="0" err="1"/>
+              <a:t>Itachi</a:t>
+            </a:r>
+            <a:r>
+              <a:rPr lang="it-IT" sz="3000" b="1" dirty="0"/>
+              <a:t> </a:t>
+            </a:r>
+            <a:r>
+              <a:rPr lang="it-IT" sz="3000" b="1" dirty="0" err="1"/>
+              <a:t>Uchiha</a:t>
+            </a:r>
+            <a:endParaRPr sz="3000" b="1" dirty="0">
+              <a:solidFill>
+                <a:srgbClr val="0F172A"/>
+              </a:solidFill>
+            </a:endParaRPr>
+          </a:p>
+        </p:txBody>
+      </p:sp>
+      <p:sp>
+        <p:nvSpPr>
+          <p:cNvPr id="2" name="Rettangolo 1">
+            <a:extLst>
+              <a:ext uri="{FF2B5EF4-FFF2-40B4-BE49-F238E27FC236}">
+                <a16:creationId xmlns:a16="http://schemas.microsoft.com/office/drawing/2014/main" id="{1523823A-5763-4810-A22D-C68840FF7AE6}"/>
+              </a:ext>
+            </a:extLst>
+          </p:cNvPr>
+          <p:cNvSpPr>
+            <a:spLocks noGrp="1"/>
+          </p:cNvSpPr>
+          <p:nvPr/>
+        </p:nvSpPr>
+        <p:spPr>
+          <a:xfrm>
+            <a:off x="400050" y="1123950"/>
+            <a:ext cx="10553700" cy="838200"/>
+          </a:xfrm>
+          <a:prstGeom prst="rect">
+            <a:avLst/>
+          </a:prstGeom>
+          <a:noFill/>
+          <a:ln w="0">
+            <a:noFill/>
+            <a:prstDash val="solid"/>
+          </a:ln>
+        </p:spPr>
+        <p:txBody>
+          <a:bodyPr/>
+          <a:lstStyle/>
+          <a:p>
+            <a:pPr>
+              <a:defRPr sz="1500" b="0">
+                <a:solidFill>
+                  <a:srgbClr val="475569"/>
+                </a:solidFill>
+              </a:defRPr>
+            </a:pPr>
+            <a:r>
+              <a:rPr lang="it-IT" sz="1500" dirty="0"/>
+              <a:t>La tripla finale è il prodotto di un processo controllato: </a:t>
+            </a:r>
+          </a:p>
+          <a:p>
+            <a:pPr>
+              <a:defRPr sz="1500" b="0">
+                <a:solidFill>
+                  <a:srgbClr val="475569"/>
+                </a:solidFill>
+              </a:defRPr>
+            </a:pPr>
+            <a:endParaRPr lang="it-IT" sz="1500" dirty="0"/>
+          </a:p>
+          <a:p>
+            <a:pPr>
+              <a:defRPr sz="1500" b="0">
+                <a:solidFill>
+                  <a:srgbClr val="475569"/>
+                </a:solidFill>
+              </a:defRPr>
+            </a:pPr>
+            <a:r>
+              <a:rPr lang="it-IT" sz="1500" dirty="0"/>
+              <a:t>	esplorazione SPARQL → ipotesi LLM (CoT) → validazione umana → tipizzazione ontologica.</a:t>
+            </a:r>
+            <a:endParaRPr sz="1500" b="0" dirty="0">
+              <a:solidFill>
+                <a:srgbClr val="475569"/>
+              </a:solidFill>
+            </a:endParaRPr>
+          </a:p>
+        </p:txBody>
+      </p:sp>
+      <p:sp>
+        <p:nvSpPr>
+          <p:cNvPr id="3" name="Rettangolo 2">
+            <a:extLst>
+              <a:ext uri="{FF2B5EF4-FFF2-40B4-BE49-F238E27FC236}">
+                <a16:creationId xmlns:a16="http://schemas.microsoft.com/office/drawing/2014/main" id="{CD898ADA-0AA7-4BDF-A6A9-FE87396A8928}"/>
+              </a:ext>
+            </a:extLst>
+          </p:cNvPr>
+          <p:cNvSpPr>
+            <a:spLocks noGrp="1"/>
+          </p:cNvSpPr>
+          <p:nvPr/>
+        </p:nvSpPr>
+        <p:spPr>
+          <a:xfrm>
+            <a:off x="400050" y="6286500"/>
+            <a:ext cx="2667000" cy="228600"/>
           </a:xfrm>
           <a:prstGeom prst="rect">
             <a:avLst/>
@@ -8856,88 +9310,546 @@
           <a:lstStyle/>
           <a:p>
             <a:pPr algn="l">
-              <a:defRPr sz="1800" b="0">
-                <a:solidFill>
-                  <a:srgbClr val="FFFFFF"/>
-                </a:solidFill>
-              </a:defRPr>
-            </a:pPr>
-            <a:r>
-              <a:rPr sz="1800" b="0">
-                <a:solidFill>
-                  <a:srgbClr val="FFFFFF"/>
-                </a:solidFill>
-              </a:rPr>
-              <a:t>wd:Q1043344</a:t>
-            </a:r>
-          </a:p>
-          <a:p>
-            <a:pPr algn="l">
-              <a:defRPr sz="1800" b="0">
-                <a:solidFill>
-                  <a:srgbClr val="FFFFFF"/>
-                </a:solidFill>
-              </a:defRPr>
-            </a:pPr>
-            <a:r>
-              <a:rPr sz="1800" b="0">
-                <a:solidFill>
-                  <a:srgbClr val="FFFFFF"/>
-                </a:solidFill>
-              </a:rPr>
-              <a:t>  animanga:hasGeneralArchetype</a:t>
-            </a:r>
-          </a:p>
-          <a:p>
-            <a:pPr algn="l">
-              <a:defRPr sz="1800" b="0">
-                <a:solidFill>
-                  <a:srgbClr val="FFFFFF"/>
-                </a:solidFill>
-              </a:defRPr>
-            </a:pPr>
-            <a:r>
-              <a:rPr sz="1800" b="0">
-                <a:solidFill>
-                  <a:srgbClr val="FFFFFF"/>
-                </a:solidFill>
-              </a:rPr>
-              <a:t>    wd:Q1969230 ;</a:t>
-            </a:r>
-          </a:p>
-          <a:p>
-            <a:pPr algn="l">
-              <a:defRPr sz="1800" b="0">
-                <a:solidFill>
-                  <a:srgbClr val="FFFFFF"/>
-                </a:solidFill>
-              </a:defRPr>
-            </a:pPr>
-            <a:r>
-              <a:rPr sz="1800" b="0">
-                <a:solidFill>
-                  <a:srgbClr val="FFFFFF"/>
-                </a:solidFill>
-              </a:rPr>
-              <a:t>  animanga:hasJapaneseArchetype</a:t>
-            </a:r>
-          </a:p>
-          <a:p>
-            <a:pPr algn="l">
-              <a:defRPr sz="1800" b="0">
-                <a:solidFill>
-                  <a:srgbClr val="FFFFFF"/>
-                </a:solidFill>
-              </a:defRPr>
-            </a:pPr>
-            <a:r>
-              <a:rPr sz="1800" b="0">
-                <a:solidFill>
-                  <a:srgbClr val="FFFFFF"/>
-                </a:solidFill>
-              </a:rPr>
-              <a:t>    ex:sacrificial-shinobi .</a:t>
-            </a:r>
+              <a:defRPr sz="1125" b="1">
+                <a:solidFill>
+                  <a:srgbClr val="475569"/>
+                </a:solidFill>
+              </a:defRPr>
+            </a:pPr>
+            <a:r>
+              <a:rPr sz="1125" b="1">
+                <a:solidFill>
+                  <a:srgbClr val="475569"/>
+                </a:solidFill>
+              </a:rPr>
+              <a:t>AniManga O-KG</a:t>
+            </a:r>
+          </a:p>
+        </p:txBody>
+      </p:sp>
+      <p:sp>
+        <p:nvSpPr>
+          <p:cNvPr id="4" name="Rettangolo 3">
+            <a:extLst>
+              <a:ext uri="{FF2B5EF4-FFF2-40B4-BE49-F238E27FC236}">
+                <a16:creationId xmlns:a16="http://schemas.microsoft.com/office/drawing/2014/main" id="{1CF2EB58-6E23-471E-9A4D-28028695F816}"/>
+              </a:ext>
+            </a:extLst>
+          </p:cNvPr>
+          <p:cNvSpPr>
+            <a:spLocks noGrp="1"/>
+          </p:cNvSpPr>
+          <p:nvPr/>
+        </p:nvSpPr>
+        <p:spPr>
+          <a:xfrm>
+            <a:off x="11277600" y="6286500"/>
+            <a:ext cx="514350" cy="228600"/>
+          </a:xfrm>
+          <a:prstGeom prst="rect">
+            <a:avLst/>
+          </a:prstGeom>
+          <a:noFill/>
+          <a:ln w="0">
+            <a:noFill/>
+            <a:prstDash val="solid"/>
+          </a:ln>
+        </p:spPr>
+        <p:txBody>
+          <a:bodyPr/>
+          <a:lstStyle/>
+          <a:p>
+            <a:pPr algn="r">
+              <a:defRPr sz="1125" b="0">
+                <a:solidFill>
+                  <a:srgbClr val="475569"/>
+                </a:solidFill>
+              </a:defRPr>
+            </a:pPr>
+            <a:r>
+              <a:rPr sz="1125" b="0">
+                <a:solidFill>
+                  <a:srgbClr val="475569"/>
+                </a:solidFill>
+              </a:rPr>
+              <a:t>17</a:t>
+            </a:r>
+          </a:p>
+        </p:txBody>
+      </p:sp>
+      <p:sp>
+        <p:nvSpPr>
+          <p:cNvPr id="12" name="Rettangolo 11">
+            <a:extLst>
+              <a:ext uri="{FF2B5EF4-FFF2-40B4-BE49-F238E27FC236}">
+                <a16:creationId xmlns:a16="http://schemas.microsoft.com/office/drawing/2014/main" id="{884F45BA-6C56-D8BC-0F3D-CC706A23688D}"/>
+              </a:ext>
+            </a:extLst>
+          </p:cNvPr>
+          <p:cNvSpPr>
+            <a:spLocks noGrp="1"/>
+          </p:cNvSpPr>
+          <p:nvPr/>
+        </p:nvSpPr>
+        <p:spPr>
+          <a:xfrm>
+            <a:off x="400050" y="2185757"/>
+            <a:ext cx="9126244" cy="3872378"/>
+          </a:xfrm>
+          <a:prstGeom prst="rect">
+            <a:avLst/>
+          </a:prstGeom>
+          <a:solidFill>
+            <a:srgbClr val="F8FAFC"/>
+          </a:solidFill>
+          <a:ln w="9525">
+            <a:solidFill>
+              <a:srgbClr val="E2E8F0"/>
+            </a:solidFill>
+            <a:prstDash val="solid"/>
+          </a:ln>
+        </p:spPr>
+        <p:txBody>
+          <a:bodyPr/>
+          <a:lstStyle/>
+          <a:p>
+            <a:endParaRPr lang="it-IT"/>
+          </a:p>
+        </p:txBody>
+      </p:sp>
+      <p:sp>
+        <p:nvSpPr>
+          <p:cNvPr id="13" name="Rettangolo 12">
+            <a:extLst>
+              <a:ext uri="{FF2B5EF4-FFF2-40B4-BE49-F238E27FC236}">
+                <a16:creationId xmlns:a16="http://schemas.microsoft.com/office/drawing/2014/main" id="{D518E31E-7B60-E264-CFFA-06928D925973}"/>
+              </a:ext>
+            </a:extLst>
+          </p:cNvPr>
+          <p:cNvSpPr>
+            <a:spLocks noGrp="1"/>
+          </p:cNvSpPr>
+          <p:nvPr/>
+        </p:nvSpPr>
+        <p:spPr>
+          <a:xfrm>
+            <a:off x="970485" y="2890976"/>
+            <a:ext cx="152400" cy="152400"/>
+          </a:xfrm>
+          <a:prstGeom prst="rect">
+            <a:avLst/>
+          </a:prstGeom>
+          <a:solidFill>
+            <a:schemeClr val="accent2"/>
+          </a:solidFill>
+          <a:ln w="9525">
+            <a:solidFill>
+              <a:schemeClr val="accent2"/>
+            </a:solidFill>
+            <a:prstDash val="solid"/>
+          </a:ln>
+        </p:spPr>
+        <p:txBody>
+          <a:bodyPr/>
+          <a:lstStyle/>
+          <a:p>
+            <a:endParaRPr lang="it-IT"/>
+          </a:p>
+        </p:txBody>
+      </p:sp>
+      <p:sp>
+        <p:nvSpPr>
+          <p:cNvPr id="14" name="Rettangolo 13">
+            <a:extLst>
+              <a:ext uri="{FF2B5EF4-FFF2-40B4-BE49-F238E27FC236}">
+                <a16:creationId xmlns:a16="http://schemas.microsoft.com/office/drawing/2014/main" id="{6D0CA989-8847-F864-21DF-81F28924332F}"/>
+              </a:ext>
+            </a:extLst>
+          </p:cNvPr>
+          <p:cNvSpPr>
+            <a:spLocks noGrp="1"/>
+          </p:cNvSpPr>
+          <p:nvPr/>
+        </p:nvSpPr>
+        <p:spPr>
+          <a:xfrm>
+            <a:off x="1307652" y="2811652"/>
+            <a:ext cx="7931183" cy="457200"/>
+          </a:xfrm>
+          <a:prstGeom prst="rect">
+            <a:avLst/>
+          </a:prstGeom>
+          <a:noFill/>
+          <a:ln w="0">
+            <a:noFill/>
+            <a:prstDash val="solid"/>
+          </a:ln>
+        </p:spPr>
+        <p:txBody>
+          <a:bodyPr/>
+          <a:lstStyle/>
+          <a:p>
+            <a:pPr>
+              <a:defRPr sz="1575" b="0">
+                <a:solidFill>
+                  <a:srgbClr val="0F172A"/>
+                </a:solidFill>
+              </a:defRPr>
+            </a:pPr>
+            <a:r>
+              <a:rPr lang="it-IT" sz="1575" b="1" dirty="0" err="1"/>
+              <a:t>Itachi</a:t>
+            </a:r>
+            <a:r>
+              <a:rPr lang="it-IT" sz="1575" b="1" dirty="0"/>
+              <a:t> </a:t>
+            </a:r>
+            <a:r>
+              <a:rPr lang="it-IT" sz="1575" b="1" dirty="0" err="1"/>
+              <a:t>Uchiha</a:t>
+            </a:r>
+            <a:r>
+              <a:rPr lang="it-IT" sz="1575" b="1" dirty="0"/>
+              <a:t> (wd:Q1043344)</a:t>
+            </a:r>
+            <a:r>
+              <a:rPr lang="it-IT" sz="1575" dirty="0"/>
+              <a:t> viene tipizzato come </a:t>
+            </a:r>
+            <a:r>
+              <a:rPr lang="it-IT" sz="1575" dirty="0" err="1"/>
+              <a:t>rdf:type</a:t>
+            </a:r>
+            <a:r>
+              <a:rPr lang="it-IT" sz="1575" dirty="0"/>
+              <a:t> </a:t>
+            </a:r>
+            <a:r>
+              <a:rPr lang="it-IT" sz="1575" dirty="0" err="1"/>
+              <a:t>am:Character</a:t>
+            </a:r>
+            <a:r>
+              <a:rPr lang="it-IT" sz="1575" dirty="0"/>
+              <a:t>.</a:t>
+            </a:r>
+            <a:endParaRPr sz="1575" b="0" dirty="0">
+              <a:solidFill>
+                <a:srgbClr val="0F172A"/>
+              </a:solidFill>
+            </a:endParaRPr>
+          </a:p>
+        </p:txBody>
+      </p:sp>
+      <p:sp>
+        <p:nvSpPr>
+          <p:cNvPr id="15" name="Rettangolo 14">
+            <a:extLst>
+              <a:ext uri="{FF2B5EF4-FFF2-40B4-BE49-F238E27FC236}">
+                <a16:creationId xmlns:a16="http://schemas.microsoft.com/office/drawing/2014/main" id="{1419F413-B36A-D814-A117-F45620D417DE}"/>
+              </a:ext>
+            </a:extLst>
+          </p:cNvPr>
+          <p:cNvSpPr>
+            <a:spLocks noGrp="1"/>
+          </p:cNvSpPr>
+          <p:nvPr/>
+        </p:nvSpPr>
+        <p:spPr>
+          <a:xfrm>
+            <a:off x="970485" y="3457528"/>
+            <a:ext cx="152400" cy="152400"/>
+          </a:xfrm>
+          <a:prstGeom prst="rect">
+            <a:avLst/>
+          </a:prstGeom>
+          <a:solidFill>
+            <a:schemeClr val="accent2"/>
+          </a:solidFill>
+          <a:ln w="9525">
+            <a:solidFill>
+              <a:schemeClr val="accent2"/>
+            </a:solidFill>
+            <a:prstDash val="solid"/>
+          </a:ln>
+        </p:spPr>
+        <p:txBody>
+          <a:bodyPr/>
+          <a:lstStyle/>
+          <a:p>
+            <a:endParaRPr lang="it-IT"/>
+          </a:p>
+        </p:txBody>
+      </p:sp>
+      <p:sp>
+        <p:nvSpPr>
+          <p:cNvPr id="16" name="Rettangolo 15">
+            <a:extLst>
+              <a:ext uri="{FF2B5EF4-FFF2-40B4-BE49-F238E27FC236}">
+                <a16:creationId xmlns:a16="http://schemas.microsoft.com/office/drawing/2014/main" id="{4676DE9F-81B9-2FC9-B8B5-6F8815D0D07D}"/>
+              </a:ext>
+            </a:extLst>
+          </p:cNvPr>
+          <p:cNvSpPr>
+            <a:spLocks noGrp="1"/>
+          </p:cNvSpPr>
+          <p:nvPr/>
+        </p:nvSpPr>
+        <p:spPr>
+          <a:xfrm>
+            <a:off x="1307652" y="3425377"/>
+            <a:ext cx="8200564" cy="353305"/>
+          </a:xfrm>
+          <a:prstGeom prst="rect">
+            <a:avLst/>
+          </a:prstGeom>
+          <a:noFill/>
+          <a:ln w="0">
+            <a:noFill/>
+            <a:prstDash val="solid"/>
+          </a:ln>
+        </p:spPr>
+        <p:txBody>
+          <a:bodyPr/>
+          <a:lstStyle/>
+          <a:p>
+            <a:pPr>
+              <a:defRPr sz="1575" b="0">
+                <a:solidFill>
+                  <a:srgbClr val="0F172A"/>
+                </a:solidFill>
+              </a:defRPr>
+            </a:pPr>
+            <a:r>
+              <a:rPr lang="it-IT" sz="1575" dirty="0"/>
+              <a:t>L'archetipo generale riusa </a:t>
+            </a:r>
+            <a:r>
+              <a:rPr lang="it-IT" sz="1575" dirty="0" err="1"/>
+              <a:t>Wikidata</a:t>
+            </a:r>
+            <a:r>
+              <a:rPr lang="it-IT" sz="1575" dirty="0"/>
+              <a:t>: wd:Q1969230 (</a:t>
+            </a:r>
+            <a:r>
+              <a:rPr lang="it-IT" sz="1575" i="1" dirty="0" err="1"/>
+              <a:t>tragic</a:t>
+            </a:r>
+            <a:r>
+              <a:rPr lang="it-IT" sz="1575" i="1" dirty="0"/>
+              <a:t> </a:t>
+            </a:r>
+            <a:r>
+              <a:rPr lang="it-IT" sz="1575" i="1" dirty="0" err="1"/>
+              <a:t>hero</a:t>
+            </a:r>
+            <a:r>
+              <a:rPr lang="it-IT" sz="1575" dirty="0"/>
+              <a:t>). </a:t>
+            </a:r>
+            <a:endParaRPr sz="1575" b="0" dirty="0">
+              <a:solidFill>
+                <a:srgbClr val="0F172A"/>
+              </a:solidFill>
+            </a:endParaRPr>
+          </a:p>
+        </p:txBody>
+      </p:sp>
+      <p:sp>
+        <p:nvSpPr>
+          <p:cNvPr id="17" name="Rettangolo 16">
+            <a:extLst>
+              <a:ext uri="{FF2B5EF4-FFF2-40B4-BE49-F238E27FC236}">
+                <a16:creationId xmlns:a16="http://schemas.microsoft.com/office/drawing/2014/main" id="{6E1BD019-29CE-EA39-64ED-3D92632E5DB5}"/>
+              </a:ext>
+            </a:extLst>
+          </p:cNvPr>
+          <p:cNvSpPr>
+            <a:spLocks noGrp="1"/>
+          </p:cNvSpPr>
+          <p:nvPr/>
+        </p:nvSpPr>
+        <p:spPr>
+          <a:xfrm>
+            <a:off x="970485" y="4086178"/>
+            <a:ext cx="152400" cy="152400"/>
+          </a:xfrm>
+          <a:prstGeom prst="rect">
+            <a:avLst/>
+          </a:prstGeom>
+          <a:solidFill>
+            <a:schemeClr val="accent2"/>
+          </a:solidFill>
+          <a:ln w="9525">
+            <a:solidFill>
+              <a:schemeClr val="accent2"/>
+            </a:solidFill>
+            <a:prstDash val="solid"/>
+          </a:ln>
+        </p:spPr>
+        <p:txBody>
+          <a:bodyPr/>
+          <a:lstStyle/>
+          <a:p>
+            <a:endParaRPr lang="it-IT"/>
+          </a:p>
+        </p:txBody>
+      </p:sp>
+      <p:sp>
+        <p:nvSpPr>
+          <p:cNvPr id="18" name="Rettangolo 17">
+            <a:extLst>
+              <a:ext uri="{FF2B5EF4-FFF2-40B4-BE49-F238E27FC236}">
+                <a16:creationId xmlns:a16="http://schemas.microsoft.com/office/drawing/2014/main" id="{A7B747AD-65BD-00F0-57C7-CC87245C791A}"/>
+              </a:ext>
+            </a:extLst>
+          </p:cNvPr>
+          <p:cNvSpPr>
+            <a:spLocks noGrp="1"/>
+          </p:cNvSpPr>
+          <p:nvPr/>
+        </p:nvSpPr>
+        <p:spPr>
+          <a:xfrm>
+            <a:off x="1307652" y="4018813"/>
+            <a:ext cx="7931182" cy="430721"/>
+          </a:xfrm>
+          <a:prstGeom prst="rect">
+            <a:avLst/>
+          </a:prstGeom>
+          <a:noFill/>
+          <a:ln w="0">
+            <a:noFill/>
+            <a:prstDash val="solid"/>
+          </a:ln>
+        </p:spPr>
+        <p:txBody>
+          <a:bodyPr/>
+          <a:lstStyle/>
+          <a:p>
+            <a:pPr>
+              <a:defRPr sz="1575" b="0">
+                <a:solidFill>
+                  <a:srgbClr val="0F172A"/>
+                </a:solidFill>
+              </a:defRPr>
+            </a:pPr>
+            <a:r>
+              <a:rPr lang="it-IT" sz="1575" dirty="0"/>
+              <a:t>L'archetipo giapponese diventa una nuova risorsa locale normalizzata: </a:t>
+            </a:r>
+            <a:r>
+              <a:rPr lang="it-IT" sz="1575" dirty="0" err="1"/>
+              <a:t>ex:sacrificial-shinobi</a:t>
+            </a:r>
+            <a:r>
+              <a:rPr lang="it-IT" sz="1575" dirty="0"/>
+              <a:t>.</a:t>
+            </a:r>
+            <a:endParaRPr sz="1575" b="0" dirty="0">
+              <a:solidFill>
+                <a:srgbClr val="0F172A"/>
+              </a:solidFill>
+            </a:endParaRPr>
+          </a:p>
+        </p:txBody>
+      </p:sp>
+      <p:sp>
+        <p:nvSpPr>
+          <p:cNvPr id="19" name="Rettangolo 18">
+            <a:extLst>
+              <a:ext uri="{FF2B5EF4-FFF2-40B4-BE49-F238E27FC236}">
+                <a16:creationId xmlns:a16="http://schemas.microsoft.com/office/drawing/2014/main" id="{536C57E5-2DC7-D381-59D8-AB3E7655DAAF}"/>
+              </a:ext>
+            </a:extLst>
+          </p:cNvPr>
+          <p:cNvSpPr>
+            <a:spLocks noGrp="1"/>
+          </p:cNvSpPr>
+          <p:nvPr/>
+        </p:nvSpPr>
+        <p:spPr>
+          <a:xfrm>
+            <a:off x="970485" y="4675118"/>
+            <a:ext cx="152400" cy="152400"/>
+          </a:xfrm>
+          <a:prstGeom prst="rect">
+            <a:avLst/>
+          </a:prstGeom>
+          <a:solidFill>
+            <a:schemeClr val="accent2"/>
+          </a:solidFill>
+          <a:ln w="9525">
+            <a:solidFill>
+              <a:schemeClr val="accent2"/>
+            </a:solidFill>
+            <a:prstDash val="solid"/>
+          </a:ln>
+        </p:spPr>
+        <p:txBody>
+          <a:bodyPr/>
+          <a:lstStyle/>
+          <a:p>
+            <a:endParaRPr lang="it-IT"/>
+          </a:p>
+        </p:txBody>
+      </p:sp>
+      <p:sp>
+        <p:nvSpPr>
+          <p:cNvPr id="20" name="Rettangolo 19">
+            <a:extLst>
+              <a:ext uri="{FF2B5EF4-FFF2-40B4-BE49-F238E27FC236}">
+                <a16:creationId xmlns:a16="http://schemas.microsoft.com/office/drawing/2014/main" id="{AB1C879E-7CAF-64E6-BB24-60E1D6D09DC7}"/>
+              </a:ext>
+            </a:extLst>
+          </p:cNvPr>
+          <p:cNvSpPr>
+            <a:spLocks noGrp="1"/>
+          </p:cNvSpPr>
+          <p:nvPr/>
+        </p:nvSpPr>
+        <p:spPr>
+          <a:xfrm>
+            <a:off x="1307652" y="4607753"/>
+            <a:ext cx="7931182" cy="430721"/>
+          </a:xfrm>
+          <a:prstGeom prst="rect">
+            <a:avLst/>
+          </a:prstGeom>
+          <a:noFill/>
+          <a:ln w="0">
+            <a:noFill/>
+            <a:prstDash val="solid"/>
+          </a:ln>
+        </p:spPr>
+        <p:txBody>
+          <a:bodyPr/>
+          <a:lstStyle/>
+          <a:p>
+            <a:pPr>
+              <a:defRPr sz="1575" b="0">
+                <a:solidFill>
+                  <a:srgbClr val="0F172A"/>
+                </a:solidFill>
+              </a:defRPr>
+            </a:pPr>
+            <a:r>
+              <a:rPr lang="it-IT" sz="1575" dirty="0"/>
+              <a:t>Gli LLM non scrivono il grafo: sono abilitatori per il data </a:t>
+            </a:r>
+            <a:r>
+              <a:rPr lang="it-IT" sz="1575" dirty="0" err="1"/>
+              <a:t>modeling</a:t>
+            </a:r>
+            <a:r>
+              <a:rPr lang="it-IT" sz="1575" dirty="0"/>
+              <a:t> umano.</a:t>
+            </a:r>
+            <a:endParaRPr sz="1575" b="0" dirty="0">
+              <a:solidFill>
+                <a:srgbClr val="0F172A"/>
+              </a:solidFill>
+            </a:endParaRPr>
           </a:p>
         </p:txBody>
       </p:sp>
@@ -8954,7 +9866,7 @@
 </p:sld>
 </file>
 
-<file path=ppt/slides/slide18.xml><?xml version="1.0" encoding="utf-8"?>
+<file path=ppt/slides/slide19.xml><?xml version="1.0" encoding="utf-8"?>
 <p:sld xmlns:a="http://schemas.openxmlformats.org/drawingml/2006/main" xmlns:r="http://schemas.openxmlformats.org/officeDocument/2006/relationships" xmlns:p="http://schemas.openxmlformats.org/presentationml/2006/main">
   <p:cSld>
     <p:spTree>
@@ -9038,22 +9950,22 @@
         <p:spPr>
           <a:xfrm>
             <a:off x="400050" y="1238250"/>
-            <a:ext cx="7810500" cy="533400"/>
-          </a:xfrm>
-          <a:prstGeom prst="rect">
-            <a:avLst/>
-          </a:prstGeom>
-          <a:noFill/>
-          <a:ln w="0">
-            <a:noFill/>
-            <a:prstDash val="solid"/>
-          </a:ln>
-        </p:spPr>
-        <p:txBody>
-          <a:bodyPr/>
-          <a:lstStyle/>
-          <a:p>
-            <a:pPr algn="l">
+            <a:ext cx="9773760" cy="533400"/>
+          </a:xfrm>
+          <a:prstGeom prst="rect">
+            <a:avLst/>
+          </a:prstGeom>
+          <a:noFill/>
+          <a:ln w="0">
+            <a:noFill/>
+            <a:prstDash val="solid"/>
+          </a:ln>
+        </p:spPr>
+        <p:txBody>
+          <a:bodyPr/>
+          <a:lstStyle/>
+          <a:p>
+            <a:pPr>
               <a:defRPr sz="1575" b="0">
                 <a:solidFill>
                   <a:srgbClr val="475569"/>
@@ -9061,13 +9973,26 @@
               </a:defRPr>
             </a:pPr>
             <a:r>
-              <a:rPr sz="1575" b="0">
-                <a:solidFill>
-                  <a:srgbClr val="475569"/>
-                </a:solidFill>
-              </a:rPr>
-              <a:t>AniManga O-KG propone un metodo controllato per arricchire Wikidata senza delegare tutto agli LLM.</a:t>
-            </a:r>
+              <a:rPr lang="it-IT" sz="1575" dirty="0" err="1"/>
+              <a:t>AniManga</a:t>
+            </a:r>
+            <a:r>
+              <a:rPr lang="it-IT" sz="1575" dirty="0"/>
+              <a:t> O-KG dimostra come colmare </a:t>
+            </a:r>
+            <a:r>
+              <a:rPr lang="it-IT" sz="1575" i="1" dirty="0"/>
+              <a:t>data gap</a:t>
+            </a:r>
+            <a:r>
+              <a:rPr lang="it-IT" sz="1575" dirty="0"/>
+              <a:t> strutturali senza delegare acriticamente all'AI generativa.</a:t>
+            </a:r>
+            <a:endParaRPr sz="1575" b="0" dirty="0">
+              <a:solidFill>
+                <a:srgbClr val="475569"/>
+              </a:solidFill>
+            </a:endParaRPr>
           </a:p>
         </p:txBody>
       </p:sp>
@@ -9243,7 +10168,7 @@
           <a:bodyPr/>
           <a:lstStyle/>
           <a:p>
-            <a:pPr algn="l">
+            <a:pPr>
               <a:defRPr sz="1800" b="0">
                 <a:solidFill>
                   <a:srgbClr val="0F172A"/>
@@ -9251,13 +10176,18 @@
               </a:defRPr>
             </a:pPr>
             <a:r>
-              <a:rPr sz="1800" b="0">
-                <a:solidFill>
-                  <a:srgbClr val="0F172A"/>
-                </a:solidFill>
-              </a:rPr>
-              <a:t>SPARQL individua e misura il gap.</a:t>
-            </a:r>
+              <a:rPr lang="it-IT" b="1" dirty="0"/>
+              <a:t>SPARQL</a:t>
+            </a:r>
+            <a:r>
+              <a:rPr lang="it-IT" dirty="0"/>
+              <a:t> è lo strumento diagnostico per mappare il vuoto e la frammentazione.</a:t>
+            </a:r>
+            <a:endParaRPr sz="1800" b="0" dirty="0">
+              <a:solidFill>
+                <a:srgbClr val="0F172A"/>
+              </a:solidFill>
+            </a:endParaRPr>
           </a:p>
         </p:txBody>
       </p:sp>
@@ -9333,7 +10263,7 @@
           <a:bodyPr/>
           <a:lstStyle/>
           <a:p>
-            <a:pPr algn="l">
+            <a:pPr>
               <a:defRPr sz="1800" b="0">
                 <a:solidFill>
                   <a:srgbClr val="0F172A"/>
@@ -9341,13 +10271,18 @@
               </a:defRPr>
             </a:pPr>
             <a:r>
-              <a:rPr sz="1800" b="0">
-                <a:solidFill>
-                  <a:srgbClr val="0F172A"/>
-                </a:solidFill>
-              </a:rPr>
-              <a:t>UNION rivela la frammentazione delle modellazioni.</a:t>
-            </a:r>
+              <a:rPr lang="it-IT" b="1" dirty="0"/>
+              <a:t>LLM (CoT)</a:t>
+            </a:r>
+            <a:r>
+              <a:rPr lang="it-IT" dirty="0"/>
+              <a:t> forniscono ipotesi sociologiche ad alto valore interpretativo.</a:t>
+            </a:r>
+            <a:endParaRPr sz="1800" b="0" dirty="0">
+              <a:solidFill>
+                <a:srgbClr val="0F172A"/>
+              </a:solidFill>
+            </a:endParaRPr>
           </a:p>
         </p:txBody>
       </p:sp>
@@ -9407,23 +10342,23 @@
         </p:nvSpPr>
         <p:spPr>
           <a:xfrm>
-            <a:off x="1447800" y="3200400"/>
-            <a:ext cx="9010650" cy="514350"/>
-          </a:xfrm>
-          <a:prstGeom prst="rect">
-            <a:avLst/>
-          </a:prstGeom>
-          <a:noFill/>
-          <a:ln w="0">
-            <a:noFill/>
-            <a:prstDash val="solid"/>
-          </a:ln>
-        </p:spPr>
-        <p:txBody>
-          <a:bodyPr/>
-          <a:lstStyle/>
-          <a:p>
-            <a:pPr algn="l">
+            <a:off x="1447799" y="3200400"/>
+            <a:ext cx="10155315" cy="514350"/>
+          </a:xfrm>
+          <a:prstGeom prst="rect">
+            <a:avLst/>
+          </a:prstGeom>
+          <a:noFill/>
+          <a:ln w="0">
+            <a:noFill/>
+            <a:prstDash val="solid"/>
+          </a:ln>
+        </p:spPr>
+        <p:txBody>
+          <a:bodyPr/>
+          <a:lstStyle/>
+          <a:p>
+            <a:pPr>
               <a:defRPr sz="1800" b="0">
                 <a:solidFill>
                   <a:srgbClr val="0F172A"/>
@@ -9431,13 +10366,26 @@
               </a:defRPr>
             </a:pPr>
             <a:r>
-              <a:rPr sz="1800" b="0">
-                <a:solidFill>
-                  <a:srgbClr val="0F172A"/>
-                </a:solidFill>
-              </a:rPr>
-              <a:t>Gli LLM formulano ipotesi narrative, non identificativi definitivi.</a:t>
-            </a:r>
+              <a:rPr lang="it-IT" b="1"/>
+              <a:t>L'umano nel ciclo (</a:t>
+            </a:r>
+            <a:r>
+              <a:rPr lang="it-IT" b="1" i="1"/>
+              <a:t>Human-in-the-loop</a:t>
+            </a:r>
+            <a:r>
+              <a:rPr lang="it-IT" b="1"/>
+              <a:t>)</a:t>
+            </a:r>
+            <a:r>
+              <a:rPr lang="it-IT"/>
+              <a:t> normalizza il testo testato e sceglie la strategia di riuso o creazione.</a:t>
+            </a:r>
+            <a:endParaRPr sz="1800" b="0" dirty="0">
+              <a:solidFill>
+                <a:srgbClr val="0F172A"/>
+              </a:solidFill>
+            </a:endParaRPr>
           </a:p>
         </p:txBody>
       </p:sp>
@@ -9498,22 +10446,22 @@
         <p:spPr>
           <a:xfrm>
             <a:off x="1447800" y="3752850"/>
-            <a:ext cx="9010650" cy="514350"/>
-          </a:xfrm>
-          <a:prstGeom prst="rect">
-            <a:avLst/>
-          </a:prstGeom>
-          <a:noFill/>
-          <a:ln w="0">
-            <a:noFill/>
-            <a:prstDash val="solid"/>
-          </a:ln>
-        </p:spPr>
-        <p:txBody>
-          <a:bodyPr/>
-          <a:lstStyle/>
-          <a:p>
-            <a:pPr algn="l">
+            <a:ext cx="9010650" cy="712618"/>
+          </a:xfrm>
+          <a:prstGeom prst="rect">
+            <a:avLst/>
+          </a:prstGeom>
+          <a:noFill/>
+          <a:ln w="0">
+            <a:noFill/>
+            <a:prstDash val="solid"/>
+          </a:ln>
+        </p:spPr>
+        <p:txBody>
+          <a:bodyPr/>
+          <a:lstStyle/>
+          <a:p>
+            <a:pPr>
               <a:defRPr sz="1800" b="0">
                 <a:solidFill>
                   <a:srgbClr val="0F172A"/>
@@ -9521,13 +10469,18 @@
               </a:defRPr>
             </a:pPr>
             <a:r>
-              <a:rPr sz="1800" b="0">
-                <a:solidFill>
-                  <a:srgbClr val="0F172A"/>
-                </a:solidFill>
-              </a:rPr>
-              <a:t>La validazione umana e SPARQL trasformano solo le ipotesi solide in RDF.</a:t>
-            </a:r>
+              <a:rPr lang="it-IT" b="1" dirty="0"/>
+              <a:t>La modellazione RDF (T-Box/A-Box)</a:t>
+            </a:r>
+            <a:r>
+              <a:rPr lang="it-IT" dirty="0"/>
+              <a:t> trasforma infine l'ipotesi validata in un dato semantico formalmente robusto e interoperabile con il Web globale.</a:t>
+            </a:r>
+            <a:endParaRPr sz="1800" b="0" dirty="0">
+              <a:solidFill>
+                <a:srgbClr val="0F172A"/>
+              </a:solidFill>
+            </a:endParaRPr>
           </a:p>
         </p:txBody>
       </p:sp>
@@ -9548,7 +10501,7 @@
         <p:spPr>
           <a:xfrm>
             <a:off x="1123950" y="4819650"/>
-            <a:ext cx="9334500" cy="781050"/>
+            <a:ext cx="9334500" cy="914400"/>
           </a:xfrm>
           <a:prstGeom prst="rect">
             <a:avLst/>
@@ -9638,7 +10591,7 @@
         <p:spPr>
           <a:xfrm>
             <a:off x="3143250" y="5010150"/>
-            <a:ext cx="6667500" cy="400050"/>
+            <a:ext cx="6667500" cy="609600"/>
           </a:xfrm>
           <a:prstGeom prst="rect">
             <a:avLst/>
@@ -9661,12 +10614,188 @@
               </a:defRPr>
             </a:pPr>
             <a:r>
-              <a:rPr sz="1650" b="0">
-                <a:solidFill>
-                  <a:srgbClr val="475569"/>
-                </a:solidFill>
-              </a:rPr>
-              <a:t>Il progetto trasforma un vuoto descrittivo sugli archetipi in un processo ripetibile di proposta, controllo e pubblicazione RDF.</a:t>
+              <a:rPr sz="1650" b="0" dirty="0">
+                <a:solidFill>
+                  <a:srgbClr val="475569"/>
+                </a:solidFill>
+              </a:rPr>
+              <a:t>Il </a:t>
+            </a:r>
+            <a:r>
+              <a:rPr lang="it-IT" sz="1650" b="0" dirty="0" err="1">
+                <a:solidFill>
+                  <a:srgbClr val="475569"/>
+                </a:solidFill>
+              </a:rPr>
+              <a:t>progetto</a:t>
+            </a:r>
+            <a:r>
+              <a:rPr sz="1650" b="0" dirty="0">
+                <a:solidFill>
+                  <a:srgbClr val="475569"/>
+                </a:solidFill>
+              </a:rPr>
+              <a:t> </a:t>
+            </a:r>
+            <a:r>
+              <a:rPr lang="it-IT" sz="1650" b="0" dirty="0" err="1">
+                <a:solidFill>
+                  <a:srgbClr val="475569"/>
+                </a:solidFill>
+              </a:rPr>
+              <a:t>trasforma</a:t>
+            </a:r>
+            <a:r>
+              <a:rPr sz="1650" b="0" dirty="0">
+                <a:solidFill>
+                  <a:srgbClr val="475569"/>
+                </a:solidFill>
+              </a:rPr>
+              <a:t> un </a:t>
+            </a:r>
+            <a:r>
+              <a:rPr lang="it-IT" sz="1650" b="0" dirty="0" err="1">
+                <a:solidFill>
+                  <a:srgbClr val="475569"/>
+                </a:solidFill>
+              </a:rPr>
+              <a:t>vuoto</a:t>
+            </a:r>
+            <a:r>
+              <a:rPr sz="1650" b="0" dirty="0">
+                <a:solidFill>
+                  <a:srgbClr val="475569"/>
+                </a:solidFill>
+              </a:rPr>
+              <a:t> </a:t>
+            </a:r>
+            <a:r>
+              <a:rPr lang="it-IT" sz="1650" b="0" dirty="0" err="1">
+                <a:solidFill>
+                  <a:srgbClr val="475569"/>
+                </a:solidFill>
+              </a:rPr>
+              <a:t>descrittivo</a:t>
+            </a:r>
+            <a:r>
+              <a:rPr sz="1650" b="0" dirty="0">
+                <a:solidFill>
+                  <a:srgbClr val="475569"/>
+                </a:solidFill>
+              </a:rPr>
+              <a:t> </a:t>
+            </a:r>
+            <a:r>
+              <a:rPr lang="it-IT" sz="1650" b="0" dirty="0" err="1">
+                <a:solidFill>
+                  <a:srgbClr val="475569"/>
+                </a:solidFill>
+              </a:rPr>
+              <a:t>sugli</a:t>
+            </a:r>
+            <a:r>
+              <a:rPr sz="1650" b="0" dirty="0">
+                <a:solidFill>
+                  <a:srgbClr val="475569"/>
+                </a:solidFill>
+              </a:rPr>
+              <a:t> </a:t>
+            </a:r>
+            <a:r>
+              <a:rPr lang="it-IT" sz="1650" b="0" dirty="0" err="1">
+                <a:solidFill>
+                  <a:srgbClr val="475569"/>
+                </a:solidFill>
+              </a:rPr>
+              <a:t>archetipi</a:t>
+            </a:r>
+            <a:r>
+              <a:rPr sz="1650" b="0" dirty="0">
+                <a:solidFill>
+                  <a:srgbClr val="475569"/>
+                </a:solidFill>
+              </a:rPr>
+              <a:t> in un </a:t>
+            </a:r>
+            <a:r>
+              <a:rPr lang="it-IT" sz="1650" b="0" dirty="0" err="1">
+                <a:solidFill>
+                  <a:srgbClr val="475569"/>
+                </a:solidFill>
+              </a:rPr>
+              <a:t>processo</a:t>
+            </a:r>
+            <a:r>
+              <a:rPr sz="1650" b="0" dirty="0">
+                <a:solidFill>
+                  <a:srgbClr val="475569"/>
+                </a:solidFill>
+              </a:rPr>
+              <a:t> </a:t>
+            </a:r>
+            <a:r>
+              <a:rPr lang="it-IT" sz="1650" b="0" dirty="0" err="1">
+                <a:solidFill>
+                  <a:srgbClr val="475569"/>
+                </a:solidFill>
+              </a:rPr>
+              <a:t>ripetibile</a:t>
+            </a:r>
+            <a:r>
+              <a:rPr sz="1650" b="0" dirty="0">
+                <a:solidFill>
+                  <a:srgbClr val="475569"/>
+                </a:solidFill>
+              </a:rPr>
+              <a:t> di </a:t>
+            </a:r>
+            <a:r>
+              <a:rPr lang="it-IT" sz="1650" b="0" dirty="0" err="1">
+                <a:solidFill>
+                  <a:srgbClr val="475569"/>
+                </a:solidFill>
+              </a:rPr>
+              <a:t>proposta</a:t>
+            </a:r>
+            <a:r>
+              <a:rPr sz="1650" b="0" dirty="0">
+                <a:solidFill>
+                  <a:srgbClr val="475569"/>
+                </a:solidFill>
+              </a:rPr>
+              <a:t>, </a:t>
+            </a:r>
+            <a:r>
+              <a:rPr lang="it-IT" sz="1650" b="0" dirty="0" err="1">
+                <a:solidFill>
+                  <a:srgbClr val="475569"/>
+                </a:solidFill>
+              </a:rPr>
+              <a:t>controllo</a:t>
+            </a:r>
+            <a:r>
+              <a:rPr sz="1650" b="0" dirty="0">
+                <a:solidFill>
+                  <a:srgbClr val="475569"/>
+                </a:solidFill>
+              </a:rPr>
+              <a:t> e </a:t>
+            </a:r>
+            <a:r>
+              <a:rPr lang="it-IT" sz="1650" b="0" dirty="0" err="1">
+                <a:solidFill>
+                  <a:srgbClr val="475569"/>
+                </a:solidFill>
+              </a:rPr>
+              <a:t>pubblicazione</a:t>
+            </a:r>
+            <a:r>
+              <a:rPr sz="1650" b="0" dirty="0">
+                <a:solidFill>
+                  <a:srgbClr val="475569"/>
+                </a:solidFill>
+              </a:rPr>
+              <a:t> RDF.</a:t>
             </a:r>
           </a:p>
         </p:txBody>
